--- a/catos-farewell/CATOS_Farewell_Ferrara_Aug2026.pptx
+++ b/catos-farewell/CATOS_Farewell_Ferrara_Aug2026.pptx
@@ -5010,7 +5010,7 @@
         <p:spPr>
           <a:xfrm>
             <a:off x="640080" y="1737360"/>
-            <a:ext cx="9601200" cy="2011680"/>
+            <a:ext cx="10607040" cy="2011680"/>
           </a:xfrm>
           <a:prstGeom prst="rect">
             <a:avLst/>
@@ -5024,12 +5024,12 @@
           <a:p>
             <a:pPr indent="0" marL="0">
               <a:lnSpc>
-                <a:spcPts val="5600"/>
+                <a:spcPts val="5400"/>
               </a:lnSpc>
               <a:buNone/>
             </a:pPr>
             <a:r>
-              <a:rPr lang="en-US" sz="5000" b="1" dirty="0">
+              <a:rPr lang="en-US" sz="4600" b="1" dirty="0">
                 <a:solidFill>
                   <a:srgbClr val="FFFFFF"/>
                 </a:solidFill>
@@ -5037,19 +5037,19 @@
                 <a:ea typeface="Cambria" pitchFamily="34" charset="-122"/>
                 <a:cs typeface="Cambria" pitchFamily="34" charset="-120"/>
               </a:rPr>
-              <a:t>What the Data Said,</a:t>
-            </a:r>
-            <a:endParaRPr lang="en-US" sz="5000" dirty="0"/>
+              <a:t>What the Data Says,</a:t>
+            </a:r>
+            <a:endParaRPr lang="en-US" sz="4600" dirty="0"/>
           </a:p>
           <a:p>
             <a:pPr indent="0" marL="0">
               <a:lnSpc>
-                <a:spcPts val="5600"/>
+                <a:spcPts val="5400"/>
               </a:lnSpc>
               <a:buNone/>
             </a:pPr>
             <a:r>
-              <a:rPr lang="en-US" sz="5000" b="1" dirty="0">
+              <a:rPr lang="en-US" sz="4600" b="1" dirty="0">
                 <a:solidFill>
                   <a:srgbClr val="FFFFFF"/>
                 </a:solidFill>
@@ -5057,9 +5057,9 @@
                 <a:ea typeface="Cambria" pitchFamily="34" charset="-122"/>
                 <a:cs typeface="Cambria" pitchFamily="34" charset="-120"/>
               </a:rPr>
-              <a:t>and What It Taught Us</a:t>
-            </a:r>
-            <a:endParaRPr lang="en-US" sz="5000" dirty="0"/>
+              <a:t>and What Singapore Taught Me</a:t>
+            </a:r>
+            <a:endParaRPr lang="en-US" sz="4600" dirty="0"/>
           </a:p>
         </p:txBody>
       </p:sp>

--- a/catos-farewell/CATOS_Farewell_Ferrara_Aug2026.pptx
+++ b/catos-farewell/CATOS_Farewell_Ferrara_Aug2026.pptx
@@ -492,7 +492,7 @@
           </c:tx>
           <c:spPr>
             <a:solidFill>
-              <a:srgbClr val="7A7A7A"/>
+              <a:srgbClr val="C9C2B8"/>
             </a:solidFill>
             <a:effectLst/>
           </c:spPr>
@@ -527,7 +527,7 @@
             <c:bubble3D val="0"/>
             <c:spPr>
               <a:solidFill>
-                <a:srgbClr val="7A7A7A"/>
+                <a:srgbClr val="C9C2B8"/>
               </a:solidFill>
               <a:effectLst/>
             </c:spPr>
@@ -1259,6 +1259,7 @@
         <c:scaling>
           <c:orientation val="minMax"/>
           <c:max val="0.6"/>
+          <c:min val="0"/>
         </c:scaling>
         <c:delete val="0"/>
         <c:axPos val="l"/>
@@ -20232,7 +20233,7 @@
         </p:nvSpPr>
         <p:spPr>
           <a:xfrm>
-            <a:off x="914400" y="2560320"/>
+            <a:off x="914400" y="2514600"/>
             <a:ext cx="457200" cy="548640"/>
           </a:xfrm>
           <a:prstGeom prst="rect">
@@ -20271,7 +20272,7 @@
         </p:nvSpPr>
         <p:spPr>
           <a:xfrm>
-            <a:off x="1508760" y="2532888"/>
+            <a:off x="1508760" y="2487168"/>
             <a:ext cx="5120640" cy="594360"/>
           </a:xfrm>
           <a:prstGeom prst="rect">
@@ -20310,7 +20311,7 @@
         </p:nvSpPr>
         <p:spPr>
           <a:xfrm>
-            <a:off x="6766560" y="2532888"/>
+            <a:off x="6766560" y="2487168"/>
             <a:ext cx="4480560" cy="594360"/>
           </a:xfrm>
           <a:prstGeom prst="rect">
@@ -20349,7 +20350,7 @@
         </p:nvSpPr>
         <p:spPr>
           <a:xfrm>
-            <a:off x="640080" y="3282696"/>
+            <a:off x="640080" y="3191256"/>
             <a:ext cx="10881360" cy="786384"/>
           </a:xfrm>
           <a:prstGeom prst="roundRect">
@@ -20376,7 +20377,7 @@
         </p:nvSpPr>
         <p:spPr>
           <a:xfrm>
-            <a:off x="914400" y="3383280"/>
+            <a:off x="914400" y="3291840"/>
             <a:ext cx="457200" cy="548640"/>
           </a:xfrm>
           <a:prstGeom prst="rect">
@@ -20415,7 +20416,7 @@
         </p:nvSpPr>
         <p:spPr>
           <a:xfrm>
-            <a:off x="1508760" y="3355848"/>
+            <a:off x="1508760" y="3264408"/>
             <a:ext cx="5120640" cy="594360"/>
           </a:xfrm>
           <a:prstGeom prst="rect">
@@ -20454,7 +20455,7 @@
         </p:nvSpPr>
         <p:spPr>
           <a:xfrm>
-            <a:off x="6766560" y="3355848"/>
+            <a:off x="6766560" y="3264408"/>
             <a:ext cx="4480560" cy="594360"/>
           </a:xfrm>
           <a:prstGeom prst="rect">
@@ -20493,7 +20494,7 @@
         </p:nvSpPr>
         <p:spPr>
           <a:xfrm>
-            <a:off x="914400" y="4206240"/>
+            <a:off x="914400" y="4069080"/>
             <a:ext cx="457200" cy="548640"/>
           </a:xfrm>
           <a:prstGeom prst="rect">
@@ -20532,7 +20533,7 @@
         </p:nvSpPr>
         <p:spPr>
           <a:xfrm>
-            <a:off x="1508760" y="4178808"/>
+            <a:off x="1508760" y="4041648"/>
             <a:ext cx="5120640" cy="594360"/>
           </a:xfrm>
           <a:prstGeom prst="rect">
@@ -20571,7 +20572,7 @@
         </p:nvSpPr>
         <p:spPr>
           <a:xfrm>
-            <a:off x="6766560" y="4178808"/>
+            <a:off x="6766560" y="4041648"/>
             <a:ext cx="4480560" cy="594360"/>
           </a:xfrm>
           <a:prstGeom prst="rect">
@@ -20610,7 +20611,7 @@
         </p:nvSpPr>
         <p:spPr>
           <a:xfrm>
-            <a:off x="640080" y="4928616"/>
+            <a:off x="640080" y="4745736"/>
             <a:ext cx="10881360" cy="786384"/>
           </a:xfrm>
           <a:prstGeom prst="roundRect">
@@ -20637,7 +20638,7 @@
         </p:nvSpPr>
         <p:spPr>
           <a:xfrm>
-            <a:off x="914400" y="5029200"/>
+            <a:off x="914400" y="4846320"/>
             <a:ext cx="457200" cy="548640"/>
           </a:xfrm>
           <a:prstGeom prst="rect">
@@ -20676,7 +20677,7 @@
         </p:nvSpPr>
         <p:spPr>
           <a:xfrm>
-            <a:off x="1508760" y="5001768"/>
+            <a:off x="1508760" y="4818888"/>
             <a:ext cx="5120640" cy="594360"/>
           </a:xfrm>
           <a:prstGeom prst="rect">
@@ -20715,7 +20716,7 @@
         </p:nvSpPr>
         <p:spPr>
           <a:xfrm>
-            <a:off x="6766560" y="5001768"/>
+            <a:off x="6766560" y="4818888"/>
             <a:ext cx="4480560" cy="594360"/>
           </a:xfrm>
           <a:prstGeom prst="rect">
@@ -20754,12 +20755,12 @@
         </p:nvSpPr>
         <p:spPr>
           <a:xfrm>
-            <a:off x="640080" y="5532120"/>
-            <a:ext cx="10881360" cy="822960"/>
+            <a:off x="640080" y="5577840"/>
+            <a:ext cx="10881360" cy="777240"/>
           </a:xfrm>
           <a:prstGeom prst="roundRect">
             <a:avLst>
-              <a:gd name="adj" fmla="val 5556"/>
+              <a:gd name="adj" fmla="val 5882"/>
             </a:avLst>
           </a:prstGeom>
           <a:solidFill>
@@ -20781,7 +20782,7 @@
         </p:nvSpPr>
         <p:spPr>
           <a:xfrm>
-            <a:off x="1005840" y="5577840"/>
+            <a:off x="1005840" y="5596128"/>
             <a:ext cx="10149840" cy="731520"/>
           </a:xfrm>
           <a:prstGeom prst="rect">

--- a/catos-farewell/CATOS_Farewell_Ferrara_Aug2026.pptx
+++ b/catos-farewell/CATOS_Farewell_Ferrara_Aug2026.pptx
@@ -7507,7 +7507,7 @@
           <a:p>
             <a:r>
               <a:rPr lang="en-US" dirty="0"/>
-              <a:t>Credit Vishakha properly — this is her analysis and her repo; I was a sounding board. The finding that travels: bias here is not noise, it has a stable direction per model, and the direction moves when you change who the model thinks is asking. Meeting again Aug 3; the persona work in Singapore's languages is the natural next step.</a:t>
+              <a:t>Credit Vishakha properly — this is her analysis and her repo; I was a sounding board. Numbers on this slide are confirmed against her repo and her 30 July consolidated report, not a meeting note. The finding that travels: bias here is not noise, it has a stable direction per model, and the direction moves when you change who the model thinks is asking — but not in the naive way. The US-citizen persona is a downward shift, not a self-flattering one, which kills the obvious hypothesis. If asked about Singapore: all seven models over-rate it, though the absolute error stays low. Thirty-three personas have now been run, including Singapore in Malay, Chinese and Tamil, so the language work I suggested is done rather than pending. Meeting again Aug 3.</a:t>
             </a:r>
             <a:endParaRPr lang="en-US" dirty="0"/>
           </a:p>
@@ -34392,7 +34392,7 @@
                 <a:ea typeface="Calibri" pitchFamily="34" charset="-122"/>
                 <a:cs typeface="Calibri" pitchFamily="34" charset="-120"/>
               </a:rPr>
-              <a:t>Ask several models to score countries on governance — transparency, corruption, rule of law — then change </a:t>
+              <a:t>Ask seven models to score countries on freedom and governance — civil liberties, political rights, rule of law — then change </a:t>
             </a:r>
             <a:pPr indent="0" marL="0">
               <a:buNone/>
@@ -34463,6 +34463,328 @@
         <p:spPr>
           <a:xfrm>
             <a:off x="640080" y="2377440"/>
+            <a:ext cx="3502152" cy="1600200"/>
+          </a:xfrm>
+          <a:prstGeom prst="roundRect">
+            <a:avLst>
+              <a:gd name="adj" fmla="val 2857"/>
+            </a:avLst>
+          </a:prstGeom>
+          <a:solidFill>
+            <a:srgbClr val="F6D9CA"/>
+          </a:solidFill>
+          <a:ln w="12700">
+            <a:solidFill>
+              <a:srgbClr val="333333"/>
+            </a:solidFill>
+            <a:prstDash val="solid"/>
+          </a:ln>
+        </p:spPr>
+      </p:sp>
+      <p:sp>
+        <p:nvSpPr>
+          <p:cNvPr id="10" name="Text 8"/>
+          <p:cNvSpPr/>
+          <p:nvPr/>
+        </p:nvSpPr>
+        <p:spPr>
+          <a:xfrm>
+            <a:off x="914400" y="2542032"/>
+            <a:ext cx="2267712" cy="411480"/>
+          </a:xfrm>
+          <a:prstGeom prst="rect">
+            <a:avLst/>
+          </a:prstGeom>
+          <a:noFill/>
+          <a:ln/>
+        </p:spPr>
+        <p:txBody>
+          <a:bodyPr wrap="square" lIns="0" tIns="0" rIns="0" bIns="0" rtlCol="0" anchor="ctr"/>
+          <a:lstStyle/>
+          <a:p>
+            <a:pPr indent="0" marL="0">
+              <a:buNone/>
+            </a:pPr>
+            <a:r>
+              <a:rPr lang="en-US" sz="2380" b="1" dirty="0">
+                <a:solidFill>
+                  <a:srgbClr val="1A1A1A"/>
+                </a:solidFill>
+                <a:latin typeface="Calibri" pitchFamily="34" charset="0"/>
+                <a:ea typeface="Calibri" pitchFamily="34" charset="-122"/>
+                <a:cs typeface="Calibri" pitchFamily="34" charset="-120"/>
+              </a:rPr>
+              <a:t>Llama 3.3</a:t>
+            </a:r>
+            <a:endParaRPr lang="en-US" sz="2380" dirty="0"/>
+          </a:p>
+        </p:txBody>
+      </p:sp>
+      <p:sp>
+        <p:nvSpPr>
+          <p:cNvPr id="11" name="Text 9"/>
+          <p:cNvSpPr/>
+          <p:nvPr/>
+        </p:nvSpPr>
+        <p:spPr>
+          <a:xfrm>
+            <a:off x="3209544" y="2468880"/>
+            <a:ext cx="658368" cy="603504"/>
+          </a:xfrm>
+          <a:prstGeom prst="rect">
+            <a:avLst/>
+          </a:prstGeom>
+          <a:noFill/>
+          <a:ln/>
+        </p:spPr>
+        <p:txBody>
+          <a:bodyPr wrap="square" lIns="0" tIns="0" rIns="0" bIns="0" rtlCol="0" anchor="ctr"/>
+          <a:lstStyle/>
+          <a:p>
+            <a:pPr algn="ctr" indent="0" marL="0">
+              <a:buNone/>
+            </a:pPr>
+            <a:r>
+              <a:rPr lang="en-US" sz="3400" b="1" dirty="0">
+                <a:solidFill>
+                  <a:srgbClr val="D04A2D"/>
+                </a:solidFill>
+                <a:latin typeface="Calibri" pitchFamily="34" charset="0"/>
+                <a:ea typeface="Calibri" pitchFamily="34" charset="-122"/>
+                <a:cs typeface="Calibri" pitchFamily="34" charset="-120"/>
+              </a:rPr>
+              <a:t>↑</a:t>
+            </a:r>
+            <a:endParaRPr lang="en-US" sz="3400" dirty="0"/>
+          </a:p>
+        </p:txBody>
+      </p:sp>
+      <p:sp>
+        <p:nvSpPr>
+          <p:cNvPr id="12" name="Text 10"/>
+          <p:cNvSpPr/>
+          <p:nvPr/>
+        </p:nvSpPr>
+        <p:spPr>
+          <a:xfrm>
+            <a:off x="914400" y="3035808"/>
+            <a:ext cx="2953512" cy="777240"/>
+          </a:xfrm>
+          <a:prstGeom prst="rect">
+            <a:avLst/>
+          </a:prstGeom>
+          <a:noFill/>
+          <a:ln/>
+        </p:spPr>
+        <p:txBody>
+          <a:bodyPr wrap="square" lIns="0" tIns="0" rIns="0" bIns="0" rtlCol="0" anchor="t"/>
+          <a:lstStyle/>
+          <a:p>
+            <a:pPr indent="0" marL="0">
+              <a:buNone/>
+            </a:pPr>
+            <a:r>
+              <a:rPr lang="en-US" sz="1590" dirty="0">
+                <a:solidFill>
+                  <a:srgbClr val="7A7A7A"/>
+                </a:solidFill>
+                <a:latin typeface="Calibri" pitchFamily="34" charset="0"/>
+                <a:ea typeface="Calibri" pitchFamily="34" charset="-122"/>
+                <a:cs typeface="Calibri" pitchFamily="34" charset="-120"/>
+              </a:rPr>
+              <a:t>rates 60.3% of countries freer</a:t>
+            </a:r>
+            <a:endParaRPr lang="en-US" sz="1590" dirty="0"/>
+          </a:p>
+          <a:p>
+            <a:pPr indent="0" marL="0">
+              <a:buNone/>
+            </a:pPr>
+            <a:r>
+              <a:rPr lang="en-US" sz="1590" dirty="0">
+                <a:solidFill>
+                  <a:srgbClr val="7A7A7A"/>
+                </a:solidFill>
+                <a:latin typeface="Calibri" pitchFamily="34" charset="0"/>
+                <a:ea typeface="Calibri" pitchFamily="34" charset="-122"/>
+                <a:cs typeface="Calibri" pitchFamily="34" charset="-120"/>
+              </a:rPr>
+              <a:t>than truth — and not once lower</a:t>
+            </a:r>
+            <a:endParaRPr lang="en-US" sz="1590" dirty="0"/>
+          </a:p>
+        </p:txBody>
+      </p:sp>
+      <p:sp>
+        <p:nvSpPr>
+          <p:cNvPr id="13" name="Shape 11"/>
+          <p:cNvSpPr/>
+          <p:nvPr/>
+        </p:nvSpPr>
+        <p:spPr>
+          <a:xfrm>
+            <a:off x="4325112" y="2377440"/>
+            <a:ext cx="3502152" cy="1600200"/>
+          </a:xfrm>
+          <a:prstGeom prst="roundRect">
+            <a:avLst>
+              <a:gd name="adj" fmla="val 2857"/>
+            </a:avLst>
+          </a:prstGeom>
+          <a:solidFill>
+            <a:srgbClr val="F6D9CA"/>
+          </a:solidFill>
+          <a:ln w="12700">
+            <a:solidFill>
+              <a:srgbClr val="333333"/>
+            </a:solidFill>
+            <a:prstDash val="solid"/>
+          </a:ln>
+        </p:spPr>
+      </p:sp>
+      <p:sp>
+        <p:nvSpPr>
+          <p:cNvPr id="14" name="Text 12"/>
+          <p:cNvSpPr/>
+          <p:nvPr/>
+        </p:nvSpPr>
+        <p:spPr>
+          <a:xfrm>
+            <a:off x="4599432" y="2542032"/>
+            <a:ext cx="2267712" cy="411480"/>
+          </a:xfrm>
+          <a:prstGeom prst="rect">
+            <a:avLst/>
+          </a:prstGeom>
+          <a:noFill/>
+          <a:ln/>
+        </p:spPr>
+        <p:txBody>
+          <a:bodyPr wrap="square" lIns="0" tIns="0" rIns="0" bIns="0" rtlCol="0" anchor="ctr"/>
+          <a:lstStyle/>
+          <a:p>
+            <a:pPr indent="0" marL="0">
+              <a:buNone/>
+            </a:pPr>
+            <a:r>
+              <a:rPr lang="en-US" sz="2380" b="1" dirty="0">
+                <a:solidFill>
+                  <a:srgbClr val="1A1A1A"/>
+                </a:solidFill>
+                <a:latin typeface="Calibri" pitchFamily="34" charset="0"/>
+                <a:ea typeface="Calibri" pitchFamily="34" charset="-122"/>
+                <a:cs typeface="Calibri" pitchFamily="34" charset="-120"/>
+              </a:rPr>
+              <a:t>Qwen 3</a:t>
+            </a:r>
+            <a:endParaRPr lang="en-US" sz="2380" dirty="0"/>
+          </a:p>
+        </p:txBody>
+      </p:sp>
+      <p:sp>
+        <p:nvSpPr>
+          <p:cNvPr id="15" name="Text 13"/>
+          <p:cNvSpPr/>
+          <p:nvPr/>
+        </p:nvSpPr>
+        <p:spPr>
+          <a:xfrm>
+            <a:off x="6894576" y="2468880"/>
+            <a:ext cx="658368" cy="603504"/>
+          </a:xfrm>
+          <a:prstGeom prst="rect">
+            <a:avLst/>
+          </a:prstGeom>
+          <a:noFill/>
+          <a:ln/>
+        </p:spPr>
+        <p:txBody>
+          <a:bodyPr wrap="square" lIns="0" tIns="0" rIns="0" bIns="0" rtlCol="0" anchor="ctr"/>
+          <a:lstStyle/>
+          <a:p>
+            <a:pPr algn="ctr" indent="0" marL="0">
+              <a:buNone/>
+            </a:pPr>
+            <a:r>
+              <a:rPr lang="en-US" sz="3400" b="1" dirty="0">
+                <a:solidFill>
+                  <a:srgbClr val="D04A2D"/>
+                </a:solidFill>
+                <a:latin typeface="Calibri" pitchFamily="34" charset="0"/>
+                <a:ea typeface="Calibri" pitchFamily="34" charset="-122"/>
+                <a:cs typeface="Calibri" pitchFamily="34" charset="-120"/>
+              </a:rPr>
+              <a:t>↑</a:t>
+            </a:r>
+            <a:endParaRPr lang="en-US" sz="3400" dirty="0"/>
+          </a:p>
+        </p:txBody>
+      </p:sp>
+      <p:sp>
+        <p:nvSpPr>
+          <p:cNvPr id="16" name="Text 14"/>
+          <p:cNvSpPr/>
+          <p:nvPr/>
+        </p:nvSpPr>
+        <p:spPr>
+          <a:xfrm>
+            <a:off x="4599432" y="3035808"/>
+            <a:ext cx="2953512" cy="777240"/>
+          </a:xfrm>
+          <a:prstGeom prst="rect">
+            <a:avLst/>
+          </a:prstGeom>
+          <a:noFill/>
+          <a:ln/>
+        </p:spPr>
+        <p:txBody>
+          <a:bodyPr wrap="square" lIns="0" tIns="0" rIns="0" bIns="0" rtlCol="0" anchor="t"/>
+          <a:lstStyle/>
+          <a:p>
+            <a:pPr indent="0" marL="0">
+              <a:buNone/>
+            </a:pPr>
+            <a:r>
+              <a:rPr lang="en-US" sz="1590" dirty="0">
+                <a:solidFill>
+                  <a:srgbClr val="7A7A7A"/>
+                </a:solidFill>
+                <a:latin typeface="Calibri" pitchFamily="34" charset="0"/>
+                <a:ea typeface="Calibri" pitchFamily="34" charset="-122"/>
+                <a:cs typeface="Calibri" pitchFamily="34" charset="-120"/>
+              </a:rPr>
+              <a:t>+0.53 classes too free;</a:t>
+            </a:r>
+            <a:endParaRPr lang="en-US" sz="1590" dirty="0"/>
+          </a:p>
+          <a:p>
+            <a:pPr indent="0" marL="0">
+              <a:buNone/>
+            </a:pPr>
+            <a:r>
+              <a:rPr lang="en-US" sz="1590" dirty="0">
+                <a:solidFill>
+                  <a:srgbClr val="7A7A7A"/>
+                </a:solidFill>
+                <a:latin typeface="Calibri" pitchFamily="34" charset="0"/>
+                <a:ea typeface="Calibri" pitchFamily="34" charset="-122"/>
+                <a:cs typeface="Calibri" pitchFamily="34" charset="-120"/>
+              </a:rPr>
+              <a:t>the widest swings in Western Asia</a:t>
+            </a:r>
+            <a:endParaRPr lang="en-US" sz="1590" dirty="0"/>
+          </a:p>
+        </p:txBody>
+      </p:sp>
+      <p:sp>
+        <p:nvSpPr>
+          <p:cNvPr id="17" name="Shape 15"/>
+          <p:cNvSpPr/>
+          <p:nvPr/>
+        </p:nvSpPr>
+        <p:spPr>
+          <a:xfrm>
+            <a:off x="8010144" y="2377440"/>
             <a:ext cx="3502152" cy="1600200"/>
           </a:xfrm>
           <a:prstGeom prst="roundRect">
@@ -34483,328 +34805,6 @@
       </p:sp>
       <p:sp>
         <p:nvSpPr>
-          <p:cNvPr id="10" name="Text 8"/>
-          <p:cNvSpPr/>
-          <p:nvPr/>
-        </p:nvSpPr>
-        <p:spPr>
-          <a:xfrm>
-            <a:off x="914400" y="2542032"/>
-            <a:ext cx="2267712" cy="411480"/>
-          </a:xfrm>
-          <a:prstGeom prst="rect">
-            <a:avLst/>
-          </a:prstGeom>
-          <a:noFill/>
-          <a:ln/>
-        </p:spPr>
-        <p:txBody>
-          <a:bodyPr wrap="square" lIns="0" tIns="0" rIns="0" bIns="0" rtlCol="0" anchor="ctr"/>
-          <a:lstStyle/>
-          <a:p>
-            <a:pPr indent="0" marL="0">
-              <a:buNone/>
-            </a:pPr>
-            <a:r>
-              <a:rPr lang="en-US" sz="2380" b="1" dirty="0">
-                <a:solidFill>
-                  <a:srgbClr val="1A1A1A"/>
-                </a:solidFill>
-                <a:latin typeface="Calibri" pitchFamily="34" charset="0"/>
-                <a:ea typeface="Calibri" pitchFamily="34" charset="-122"/>
-                <a:cs typeface="Calibri" pitchFamily="34" charset="-120"/>
-              </a:rPr>
-              <a:t>Claude</a:t>
-            </a:r>
-            <a:endParaRPr lang="en-US" sz="2380" dirty="0"/>
-          </a:p>
-        </p:txBody>
-      </p:sp>
-      <p:sp>
-        <p:nvSpPr>
-          <p:cNvPr id="11" name="Text 9"/>
-          <p:cNvSpPr/>
-          <p:nvPr/>
-        </p:nvSpPr>
-        <p:spPr>
-          <a:xfrm>
-            <a:off x="3209544" y="2468880"/>
-            <a:ext cx="658368" cy="603504"/>
-          </a:xfrm>
-          <a:prstGeom prst="rect">
-            <a:avLst/>
-          </a:prstGeom>
-          <a:noFill/>
-          <a:ln/>
-        </p:spPr>
-        <p:txBody>
-          <a:bodyPr wrap="square" lIns="0" tIns="0" rIns="0" bIns="0" rtlCol="0" anchor="ctr"/>
-          <a:lstStyle/>
-          <a:p>
-            <a:pPr algn="ctr" indent="0" marL="0">
-              <a:buNone/>
-            </a:pPr>
-            <a:r>
-              <a:rPr lang="en-US" sz="3400" b="1" dirty="0">
-                <a:solidFill>
-                  <a:srgbClr val="D04A2D"/>
-                </a:solidFill>
-                <a:latin typeface="Calibri" pitchFamily="34" charset="0"/>
-                <a:ea typeface="Calibri" pitchFamily="34" charset="-122"/>
-                <a:cs typeface="Calibri" pitchFamily="34" charset="-120"/>
-              </a:rPr>
-              <a:t>↓</a:t>
-            </a:r>
-            <a:endParaRPr lang="en-US" sz="3400" dirty="0"/>
-          </a:p>
-        </p:txBody>
-      </p:sp>
-      <p:sp>
-        <p:nvSpPr>
-          <p:cNvPr id="12" name="Text 10"/>
-          <p:cNvSpPr/>
-          <p:nvPr/>
-        </p:nvSpPr>
-        <p:spPr>
-          <a:xfrm>
-            <a:off x="914400" y="3035808"/>
-            <a:ext cx="2953512" cy="777240"/>
-          </a:xfrm>
-          <a:prstGeom prst="rect">
-            <a:avLst/>
-          </a:prstGeom>
-          <a:noFill/>
-          <a:ln/>
-        </p:spPr>
-        <p:txBody>
-          <a:bodyPr wrap="square" lIns="0" tIns="0" rIns="0" bIns="0" rtlCol="0" anchor="t"/>
-          <a:lstStyle/>
-          <a:p>
-            <a:pPr indent="0" marL="0">
-              <a:buNone/>
-            </a:pPr>
-            <a:r>
-              <a:rPr lang="en-US" sz="1590" dirty="0">
-                <a:solidFill>
-                  <a:srgbClr val="7A7A7A"/>
-                </a:solidFill>
-                <a:latin typeface="Calibri" pitchFamily="34" charset="0"/>
-                <a:ea typeface="Calibri" pitchFamily="34" charset="-122"/>
-                <a:cs typeface="Calibri" pitchFamily="34" charset="-120"/>
-              </a:rPr>
-              <a:t>pulls scores down</a:t>
-            </a:r>
-            <a:endParaRPr lang="en-US" sz="1590" dirty="0"/>
-          </a:p>
-          <a:p>
-            <a:pPr indent="0" marL="0">
-              <a:buNone/>
-            </a:pPr>
-            <a:r>
-              <a:rPr lang="en-US" sz="1590" dirty="0">
-                <a:solidFill>
-                  <a:srgbClr val="7A7A7A"/>
-                </a:solidFill>
-                <a:latin typeface="Calibri" pitchFamily="34" charset="0"/>
-                <a:ea typeface="Calibri" pitchFamily="34" charset="-122"/>
-                <a:cs typeface="Calibri" pitchFamily="34" charset="-120"/>
-              </a:rPr>
-              <a:t>consistently underestimates</a:t>
-            </a:r>
-            <a:endParaRPr lang="en-US" sz="1590" dirty="0"/>
-          </a:p>
-        </p:txBody>
-      </p:sp>
-      <p:sp>
-        <p:nvSpPr>
-          <p:cNvPr id="13" name="Shape 11"/>
-          <p:cNvSpPr/>
-          <p:nvPr/>
-        </p:nvSpPr>
-        <p:spPr>
-          <a:xfrm>
-            <a:off x="4325112" y="2377440"/>
-            <a:ext cx="3502152" cy="1600200"/>
-          </a:xfrm>
-          <a:prstGeom prst="roundRect">
-            <a:avLst>
-              <a:gd name="adj" fmla="val 2857"/>
-            </a:avLst>
-          </a:prstGeom>
-          <a:solidFill>
-            <a:srgbClr val="F6D9CA"/>
-          </a:solidFill>
-          <a:ln w="12700">
-            <a:solidFill>
-              <a:srgbClr val="333333"/>
-            </a:solidFill>
-            <a:prstDash val="solid"/>
-          </a:ln>
-        </p:spPr>
-      </p:sp>
-      <p:sp>
-        <p:nvSpPr>
-          <p:cNvPr id="14" name="Text 12"/>
-          <p:cNvSpPr/>
-          <p:nvPr/>
-        </p:nvSpPr>
-        <p:spPr>
-          <a:xfrm>
-            <a:off x="4599432" y="2542032"/>
-            <a:ext cx="2267712" cy="411480"/>
-          </a:xfrm>
-          <a:prstGeom prst="rect">
-            <a:avLst/>
-          </a:prstGeom>
-          <a:noFill/>
-          <a:ln/>
-        </p:spPr>
-        <p:txBody>
-          <a:bodyPr wrap="square" lIns="0" tIns="0" rIns="0" bIns="0" rtlCol="0" anchor="ctr"/>
-          <a:lstStyle/>
-          <a:p>
-            <a:pPr indent="0" marL="0">
-              <a:buNone/>
-            </a:pPr>
-            <a:r>
-              <a:rPr lang="en-US" sz="2380" b="1" dirty="0">
-                <a:solidFill>
-                  <a:srgbClr val="1A1A1A"/>
-                </a:solidFill>
-                <a:latin typeface="Calibri" pitchFamily="34" charset="0"/>
-                <a:ea typeface="Calibri" pitchFamily="34" charset="-122"/>
-                <a:cs typeface="Calibri" pitchFamily="34" charset="-120"/>
-              </a:rPr>
-              <a:t>OpenAI</a:t>
-            </a:r>
-            <a:endParaRPr lang="en-US" sz="2380" dirty="0"/>
-          </a:p>
-        </p:txBody>
-      </p:sp>
-      <p:sp>
-        <p:nvSpPr>
-          <p:cNvPr id="15" name="Text 13"/>
-          <p:cNvSpPr/>
-          <p:nvPr/>
-        </p:nvSpPr>
-        <p:spPr>
-          <a:xfrm>
-            <a:off x="6894576" y="2468880"/>
-            <a:ext cx="658368" cy="603504"/>
-          </a:xfrm>
-          <a:prstGeom prst="rect">
-            <a:avLst/>
-          </a:prstGeom>
-          <a:noFill/>
-          <a:ln/>
-        </p:spPr>
-        <p:txBody>
-          <a:bodyPr wrap="square" lIns="0" tIns="0" rIns="0" bIns="0" rtlCol="0" anchor="ctr"/>
-          <a:lstStyle/>
-          <a:p>
-            <a:pPr algn="ctr" indent="0" marL="0">
-              <a:buNone/>
-            </a:pPr>
-            <a:r>
-              <a:rPr lang="en-US" sz="3400" b="1" dirty="0">
-                <a:solidFill>
-                  <a:srgbClr val="D04A2D"/>
-                </a:solidFill>
-                <a:latin typeface="Calibri" pitchFamily="34" charset="0"/>
-                <a:ea typeface="Calibri" pitchFamily="34" charset="-122"/>
-                <a:cs typeface="Calibri" pitchFamily="34" charset="-120"/>
-              </a:rPr>
-              <a:t>↑</a:t>
-            </a:r>
-            <a:endParaRPr lang="en-US" sz="3400" dirty="0"/>
-          </a:p>
-        </p:txBody>
-      </p:sp>
-      <p:sp>
-        <p:nvSpPr>
-          <p:cNvPr id="16" name="Text 14"/>
-          <p:cNvSpPr/>
-          <p:nvPr/>
-        </p:nvSpPr>
-        <p:spPr>
-          <a:xfrm>
-            <a:off x="4599432" y="3035808"/>
-            <a:ext cx="2953512" cy="777240"/>
-          </a:xfrm>
-          <a:prstGeom prst="rect">
-            <a:avLst/>
-          </a:prstGeom>
-          <a:noFill/>
-          <a:ln/>
-        </p:spPr>
-        <p:txBody>
-          <a:bodyPr wrap="square" lIns="0" tIns="0" rIns="0" bIns="0" rtlCol="0" anchor="t"/>
-          <a:lstStyle/>
-          <a:p>
-            <a:pPr indent="0" marL="0">
-              <a:buNone/>
-            </a:pPr>
-            <a:r>
-              <a:rPr lang="en-US" sz="1590" dirty="0">
-                <a:solidFill>
-                  <a:srgbClr val="7A7A7A"/>
-                </a:solidFill>
-                <a:latin typeface="Calibri" pitchFamily="34" charset="0"/>
-                <a:ea typeface="Calibri" pitchFamily="34" charset="-122"/>
-                <a:cs typeface="Calibri" pitchFamily="34" charset="-120"/>
-              </a:rPr>
-              <a:t>pulls scores up</a:t>
-            </a:r>
-            <a:endParaRPr lang="en-US" sz="1590" dirty="0"/>
-          </a:p>
-          <a:p>
-            <a:pPr indent="0" marL="0">
-              <a:buNone/>
-            </a:pPr>
-            <a:r>
-              <a:rPr lang="en-US" sz="1590" dirty="0">
-                <a:solidFill>
-                  <a:srgbClr val="7A7A7A"/>
-                </a:solidFill>
-                <a:latin typeface="Calibri" pitchFamily="34" charset="0"/>
-                <a:ea typeface="Calibri" pitchFamily="34" charset="-122"/>
-                <a:cs typeface="Calibri" pitchFamily="34" charset="-120"/>
-              </a:rPr>
-              <a:t>consistently overestimates</a:t>
-            </a:r>
-            <a:endParaRPr lang="en-US" sz="1590" dirty="0"/>
-          </a:p>
-        </p:txBody>
-      </p:sp>
-      <p:sp>
-        <p:nvSpPr>
-          <p:cNvPr id="17" name="Shape 15"/>
-          <p:cNvSpPr/>
-          <p:nvPr/>
-        </p:nvSpPr>
-        <p:spPr>
-          <a:xfrm>
-            <a:off x="8010144" y="2377440"/>
-            <a:ext cx="3502152" cy="1600200"/>
-          </a:xfrm>
-          <a:prstGeom prst="roundRect">
-            <a:avLst>
-              <a:gd name="adj" fmla="val 2857"/>
-            </a:avLst>
-          </a:prstGeom>
-          <a:solidFill>
-            <a:srgbClr val="F6D9CA"/>
-          </a:solidFill>
-          <a:ln w="12700">
-            <a:solidFill>
-              <a:srgbClr val="333333"/>
-            </a:solidFill>
-            <a:prstDash val="solid"/>
-          </a:ln>
-        </p:spPr>
-      </p:sp>
-      <p:sp>
-        <p:nvSpPr>
           <p:cNvPr id="18" name="Text 16"/>
           <p:cNvSpPr/>
           <p:nvPr/>
@@ -34836,7 +34836,7 @@
                 <a:ea typeface="Calibri" pitchFamily="34" charset="-122"/>
                 <a:cs typeface="Calibri" pitchFamily="34" charset="-120"/>
               </a:rPr>
-              <a:t>DeepSeek</a:t>
+              <a:t>Claude 4.6</a:t>
             </a:r>
             <a:endParaRPr lang="en-US" sz="2380" dirty="0"/>
           </a:p>
@@ -34875,7 +34875,7 @@
                 <a:ea typeface="Calibri" pitchFamily="34" charset="-122"/>
                 <a:cs typeface="Calibri" pitchFamily="34" charset="-120"/>
               </a:rPr>
-              <a:t>↑</a:t>
+              <a:t>↓</a:t>
             </a:r>
             <a:endParaRPr lang="en-US" sz="3400" dirty="0"/>
           </a:p>
@@ -34914,7 +34914,7 @@
                 <a:ea typeface="Calibri" pitchFamily="34" charset="-122"/>
                 <a:cs typeface="Calibri" pitchFamily="34" charset="-120"/>
               </a:rPr>
-              <a:t>overestimates, and warms to</a:t>
+              <a:t>the only model that under-rates;</a:t>
             </a:r>
             <a:endParaRPr lang="en-US" sz="1590" dirty="0"/>
           </a:p>
@@ -34931,7 +34931,7 @@
                 <a:ea typeface="Calibri" pitchFamily="34" charset="-122"/>
                 <a:cs typeface="Calibri" pitchFamily="34" charset="-120"/>
               </a:rPr>
-              <a:t>Asian countries as a China persona</a:t>
+              <a:t>81.9% exact, the lowest error</a:t>
             </a:r>
             <a:endParaRPr lang="en-US" sz="1590" dirty="0"/>
           </a:p>
@@ -34945,7 +34945,7 @@
         </p:nvSpPr>
         <p:spPr>
           <a:xfrm>
-            <a:off x="640080" y="4160520"/>
+            <a:off x="640080" y="4114800"/>
             <a:ext cx="10881360" cy="274320"/>
           </a:xfrm>
           <a:prstGeom prst="rect">
@@ -34984,7 +34984,7 @@
         </p:nvSpPr>
         <p:spPr>
           <a:xfrm>
-            <a:off x="640080" y="4480560"/>
+            <a:off x="640080" y="4407408"/>
             <a:ext cx="2651760" cy="548640"/>
           </a:xfrm>
           <a:prstGeom prst="roundRect">
@@ -35011,7 +35011,7 @@
         </p:nvSpPr>
         <p:spPr>
           <a:xfrm>
-            <a:off x="640080" y="4480560"/>
+            <a:off x="640080" y="4407408"/>
             <a:ext cx="2651760" cy="548640"/>
           </a:xfrm>
           <a:prstGeom prst="rect">
@@ -35050,7 +35050,7 @@
         </p:nvSpPr>
         <p:spPr>
           <a:xfrm>
-            <a:off x="3410712" y="4480560"/>
+            <a:off x="3410712" y="4407408"/>
             <a:ext cx="2651760" cy="548640"/>
           </a:xfrm>
           <a:prstGeom prst="roundRect">
@@ -35077,7 +35077,7 @@
         </p:nvSpPr>
         <p:spPr>
           <a:xfrm>
-            <a:off x="3410712" y="4480560"/>
+            <a:off x="3410712" y="4407408"/>
             <a:ext cx="2651760" cy="548640"/>
           </a:xfrm>
           <a:prstGeom prst="rect">
@@ -35116,7 +35116,7 @@
         </p:nvSpPr>
         <p:spPr>
           <a:xfrm>
-            <a:off x="6181344" y="4480560"/>
+            <a:off x="6181344" y="4407408"/>
             <a:ext cx="2651760" cy="548640"/>
           </a:xfrm>
           <a:prstGeom prst="roundRect">
@@ -35143,7 +35143,7 @@
         </p:nvSpPr>
         <p:spPr>
           <a:xfrm>
-            <a:off x="6181344" y="4480560"/>
+            <a:off x="6181344" y="4407408"/>
             <a:ext cx="2651760" cy="548640"/>
           </a:xfrm>
           <a:prstGeom prst="rect">
@@ -35182,7 +35182,7 @@
         </p:nvSpPr>
         <p:spPr>
           <a:xfrm>
-            <a:off x="8951976" y="4480560"/>
+            <a:off x="8951976" y="4407408"/>
             <a:ext cx="2651760" cy="548640"/>
           </a:xfrm>
           <a:prstGeom prst="roundRect">
@@ -35209,7 +35209,7 @@
         </p:nvSpPr>
         <p:spPr>
           <a:xfrm>
-            <a:off x="8951976" y="4480560"/>
+            <a:off x="8951976" y="4407408"/>
             <a:ext cx="2651760" cy="548640"/>
           </a:xfrm>
           <a:prstGeom prst="rect">
@@ -35248,8 +35248,8 @@
         </p:nvSpPr>
         <p:spPr>
           <a:xfrm>
-            <a:off x="640080" y="5212080"/>
-            <a:ext cx="10881360" cy="1188720"/>
+            <a:off x="640080" y="5093208"/>
+            <a:ext cx="10881360" cy="1325880"/>
           </a:xfrm>
           <a:prstGeom prst="rect">
             <a:avLst/>
@@ -35265,7 +35265,7 @@
               <a:buNone/>
             </a:pPr>
             <a:r>
-              <a:rPr lang="en-US" sz="1800" dirty="0">
+              <a:rPr lang="en-US" sz="1590" dirty="0">
                 <a:solidFill>
                   <a:srgbClr val="1A1A1A"/>
                 </a:solidFill>
@@ -35273,13 +35273,13 @@
                 <a:ea typeface="Calibri" pitchFamily="34" charset="-122"/>
                 <a:cs typeface="Calibri" pitchFamily="34" charset="-120"/>
               </a:rPr>
-              <a:t>The direction of the error is </a:t>
-            </a:r>
-            <a:pPr indent="0" marL="0">
-              <a:buNone/>
-            </a:pPr>
-            <a:r>
-              <a:rPr lang="en-US" sz="1800" b="1" dirty="0">
+              <a:t>Over-crediting is the failure mode: </a:t>
+            </a:r>
+            <a:pPr indent="0" marL="0">
+              <a:buNone/>
+            </a:pPr>
+            <a:r>
+              <a:rPr lang="en-US" sz="1590" b="1" dirty="0">
                 <a:solidFill>
                   <a:srgbClr val="1A1A1A"/>
                 </a:solidFill>
@@ -35287,16 +35287,16 @@
                 <a:ea typeface="Calibri" pitchFamily="34" charset="-122"/>
                 <a:cs typeface="Calibri" pitchFamily="34" charset="-120"/>
               </a:rPr>
-              <a:t>stable per model</a:t>
+              <a:t>62.2% exact, 33.3% too free, 4.5% too unfree</a:t>
             </a:r>
             <a:pPr indent="0" marL="0">
               <a:spcAft>
-                <a:spcPts val="600"/>
+                <a:spcPts val="300"/>
               </a:spcAft>
               <a:buNone/>
             </a:pPr>
             <a:r>
-              <a:rPr lang="en-US" sz="1800" dirty="0">
+              <a:rPr lang="en-US" sz="1590" dirty="0">
                 <a:solidFill>
                   <a:srgbClr val="1A1A1A"/>
                 </a:solidFill>
@@ -35304,16 +35304,16 @@
                 <a:ea typeface="Calibri" pitchFamily="34" charset="-122"/>
                 <a:cs typeface="Calibri" pitchFamily="34" charset="-120"/>
               </a:rPr>
-              <a:t> and moves with the persona — a Latin America penalty under both citizen framings, and Mexico scored correctly by one model and not others.</a:t>
-            </a:r>
-            <a:endParaRPr lang="en-US" sz="1800" dirty="0"/>
-          </a:p>
-          <a:p>
-            <a:pPr indent="0" marL="0">
-              <a:buNone/>
-            </a:pPr>
-            <a:r>
-              <a:rPr lang="en-US" sz="1800" dirty="0">
+              <a:t>.</a:t>
+            </a:r>
+            <a:endParaRPr lang="en-US" sz="1590" dirty="0"/>
+          </a:p>
+          <a:p>
+            <a:pPr indent="0" marL="0">
+              <a:buNone/>
+            </a:pPr>
+            <a:r>
+              <a:rPr lang="en-US" sz="1590" dirty="0">
                 <a:solidFill>
                   <a:srgbClr val="1A1A1A"/>
                 </a:solidFill>
@@ -35321,13 +35321,13 @@
                 <a:ea typeface="Calibri" pitchFamily="34" charset="-122"/>
                 <a:cs typeface="Calibri" pitchFamily="34" charset="-120"/>
               </a:rPr>
-              <a:t>What I added: plot </a:t>
-            </a:r>
-            <a:pPr indent="0" marL="0">
-              <a:buNone/>
-            </a:pPr>
-            <a:r>
-              <a:rPr lang="en-US" sz="1800" b="1" dirty="0">
+              <a:t>Thailand and Turkey read freer than truth in </a:t>
+            </a:r>
+            <a:pPr indent="0" marL="0">
+              <a:buNone/>
+            </a:pPr>
+            <a:r>
+              <a:rPr lang="en-US" sz="1590" b="1" dirty="0">
                 <a:solidFill>
                   <a:srgbClr val="D04A2D"/>
                 </a:solidFill>
@@ -35335,16 +35335,112 @@
                 <a:ea typeface="Calibri" pitchFamily="34" charset="-122"/>
                 <a:cs typeface="Calibri" pitchFamily="34" charset="-120"/>
               </a:rPr>
+              <a:t>all 28 runs</a:t>
+            </a:r>
+            <a:pPr indent="0" marL="0">
+              <a:spcAft>
+                <a:spcPts val="300"/>
+              </a:spcAft>
+              <a:buNone/>
+            </a:pPr>
+            <a:r>
+              <a:rPr lang="en-US" sz="1590" dirty="0">
+                <a:solidFill>
+                  <a:srgbClr val="1A1A1A"/>
+                </a:solidFill>
+                <a:latin typeface="Calibri" pitchFamily="34" charset="0"/>
+                <a:ea typeface="Calibri" pitchFamily="34" charset="-122"/>
+                <a:cs typeface="Calibri" pitchFamily="34" charset="-120"/>
+              </a:rPr>
+              <a:t>; nothing is ever off by two classes.</a:t>
+            </a:r>
+            <a:endParaRPr lang="en-US" sz="1590" dirty="0"/>
+          </a:p>
+          <a:p>
+            <a:pPr indent="0" marL="0">
+              <a:buNone/>
+            </a:pPr>
+            <a:r>
+              <a:rPr lang="en-US" sz="1590" dirty="0">
+                <a:solidFill>
+                  <a:srgbClr val="1A1A1A"/>
+                </a:solidFill>
+                <a:latin typeface="Calibri" pitchFamily="34" charset="0"/>
+                <a:ea typeface="Calibri" pitchFamily="34" charset="-122"/>
+                <a:cs typeface="Calibri" pitchFamily="34" charset="-120"/>
+              </a:rPr>
+              <a:t>The US persona does not favour the US: it pushes scores </a:t>
+            </a:r>
+            <a:pPr indent="0" marL="0">
+              <a:buNone/>
+            </a:pPr>
+            <a:r>
+              <a:rPr lang="en-US" sz="1590" b="1" dirty="0">
+                <a:solidFill>
+                  <a:srgbClr val="1A1A1A"/>
+                </a:solidFill>
+                <a:latin typeface="Calibri" pitchFamily="34" charset="0"/>
+                <a:ea typeface="Calibri" pitchFamily="34" charset="-122"/>
+                <a:cs typeface="Calibri" pitchFamily="34" charset="-120"/>
+              </a:rPr>
+              <a:t>down</a:t>
+            </a:r>
+            <a:pPr indent="0" marL="0">
+              <a:spcAft>
+                <a:spcPts val="300"/>
+              </a:spcAft>
+              <a:buNone/>
+            </a:pPr>
+            <a:r>
+              <a:rPr lang="en-US" sz="1590" dirty="0">
+                <a:solidFill>
+                  <a:srgbClr val="1A1A1A"/>
+                </a:solidFill>
+                <a:latin typeface="Calibri" pitchFamily="34" charset="0"/>
+                <a:ea typeface="Calibri" pitchFamily="34" charset="-122"/>
+                <a:cs typeface="Calibri" pitchFamily="34" charset="-120"/>
+              </a:rPr>
+              <a:t>, that country hardest of all.</a:t>
+            </a:r>
+            <a:endParaRPr lang="en-US" sz="1590" dirty="0"/>
+          </a:p>
+          <a:p>
+            <a:pPr indent="0" marL="0">
+              <a:buNone/>
+            </a:pPr>
+            <a:r>
+              <a:rPr lang="en-US" sz="1590" dirty="0">
+                <a:solidFill>
+                  <a:srgbClr val="1A1A1A"/>
+                </a:solidFill>
+                <a:latin typeface="Calibri" pitchFamily="34" charset="0"/>
+                <a:ea typeface="Calibri" pitchFamily="34" charset="-122"/>
+                <a:cs typeface="Calibri" pitchFamily="34" charset="-120"/>
+              </a:rPr>
+              <a:t>What I added: </a:t>
+            </a:r>
+            <a:pPr indent="0" marL="0">
+              <a:buNone/>
+            </a:pPr>
+            <a:r>
+              <a:rPr lang="en-US" sz="1590" b="1" dirty="0">
+                <a:solidFill>
+                  <a:srgbClr val="D04A2D"/>
+                </a:solidFill>
+                <a:latin typeface="Calibri" pitchFamily="34" charset="0"/>
+                <a:ea typeface="Calibri" pitchFamily="34" charset="-122"/>
+                <a:cs typeface="Calibri" pitchFamily="34" charset="-120"/>
+              </a:rPr>
               <a:t>context minus no-context</a:t>
             </a:r>
             <a:pPr indent="0" marL="0">
               <a:spcAft>
-                <a:spcPts val="600"/>
+                <a:spcPts val="300"/>
               </a:spcAft>
               <a:buNone/>
             </a:pPr>
             <a:r>
-              <a:rPr lang="en-US" sz="1800" dirty="0">
+              <a:rPr lang="en-US" sz="1590" dirty="0">
                 <a:solidFill>
                   <a:srgbClr val="1A1A1A"/>
                 </a:solidFill>
@@ -35352,9 +35448,9 @@
                 <a:ea typeface="Calibri" pitchFamily="34" charset="-122"/>
                 <a:cs typeface="Calibri" pitchFamily="34" charset="-120"/>
               </a:rPr>
-              <a:t> to separate an induced shift from a standing bias; a per-country ranking so systematic offenders surface; finer regions than continents.</a:t>
-            </a:r>
-            <a:endParaRPr lang="en-US" sz="1800" dirty="0"/>
+              <a:t>, a per-country ranking, finer regions than continents.</a:t>
+            </a:r>
+            <a:endParaRPr lang="en-US" sz="1590" dirty="0"/>
           </a:p>
         </p:txBody>
       </p:sp>
@@ -35391,7 +35487,7 @@
                 <a:ea typeface="Calibri" pitchFamily="34" charset="-122"/>
                 <a:cs typeface="Calibri" pitchFamily="34" charset="-120"/>
               </a:rPr>
-              <a:t>Ground truth: US News soft-power index, top 90 countries. Repo: vishakha-astar/llm-bias.</a:t>
+              <a:t>Ground truth: Freedom House, GSOD, HRW. 89 countries; 51 in the classification set. Repo: vishakha-astar/llm-bias.</a:t>
             </a:r>
             <a:endParaRPr lang="en-US" sz="1010" dirty="0"/>
           </a:p>
